--- a/Werkcollege-voor-wie-maak-jij-dit.pptx
+++ b/Werkcollege-voor-wie-maak-jij-dit.pptx
@@ -11516,7 +11516,7 @@
                 </a:solidFill>
                 <a:latin typeface="Arial"/>
               </a:rPr>
-              <a:t>Laat het zien en vraag: </a:t>
+              <a:t>Laat het aan een </a:t>
             </a:r>
             <a:r>
               <a:rPr sz="1400" b="1">
@@ -11525,7 +11525,7 @@
                 </a:solidFill>
                 <a:latin typeface="Arial"/>
               </a:rPr>
-              <a:t>wat denk jij dat de boodschap is</a:t>
+              <a:t>medestudent</a:t>
             </a:r>
             <a:r>
               <a:rPr sz="1400" b="0">
@@ -11534,7 +11534,7 @@
                 </a:solidFill>
                 <a:latin typeface="Arial"/>
               </a:rPr>
-              <a:t>?</a:t>
+              <a:t> zien: wat denkt die dat de boodschap is?</a:t>
             </a:r>
           </a:p>
         </p:txBody>
@@ -12359,7 +12359,7 @@
                 </a:solidFill>
                 <a:latin typeface="Arial"/>
               </a:rPr>
-              <a:t>Begreep je toetser iets anders dan je bedoelde? </a:t>
+              <a:t>Begreep je medestudent iets anders dan je bedoelde? </a:t>
             </a:r>
             <a:r>
               <a:rPr sz="1600" b="1">
